--- a/public/fun/pack/pptx/familypro/가족소개프리미엄_49_나혼자·1인가구_스노우포레스트.pptx
+++ b/public/fun/pack/pptx/familypro/가족소개프리미엄_49_나혼자·1인가구_스노우포레스트.pptx
@@ -113,12 +113,12 @@
   <p:extLst>
     <p:ext uri="{521415D9-36F7-43E2-AB2F-B90AF26B5E84}">
       <p14:sectionLst xmlns:p14="http://schemas.microsoft.com/office/powerpoint/2010/main">
-        <p14:section name="시작" id="{0A4C77F0-8873-46E1-9973-8FDFB2958120}">
+        <p14:section name="시작" id="{AD4311DC-8DD4-4862-999E-58F386A0B13E}">
           <p14:sldIdLst>
             <p14:sldId id="256"/>
           </p14:sldIdLst>
         </p14:section>
-        <p14:section name="본문" id="{5F8A1C10-63C5-4807-9D70-B70309316032}">
+        <p14:section name="본문" id="{2160CB17-E9E9-4F6D-91E1-1A4406284DD8}">
           <p14:sldIdLst>
             <p14:sldId id="257"/>
             <p14:sldId id="258"/>
@@ -127,7 +127,7 @@
             <p14:sldId id="261"/>
           </p14:sldIdLst>
         </p14:section>
-        <p14:section name="마무리" id="{BCB5FFCF-E08E-4249-81D0-13BFDE4F6A2C}">
+        <p14:section name="마무리" id="{0D22CAE6-F986-4D44-B33C-693A8145143B}">
           <p14:sldIdLst>
             <p14:sldId id="262"/>
           </p14:sldIdLst>
@@ -2847,7 +2847,7 @@
             </a:lvl1pPr>
           </a:lstStyle>
           <a:p>
-            <a:fld id="{EE6CA10E-34E6-4B62-9385-A2451443F2E7}" type="slidenum">
+            <a:fld id="{79A67F04-C372-48C5-A608-35214B170872}" type="slidenum">
               <a:rPr lang="en-US"/>
               <a:t>‹#›</a:t>
             </a:fld>
@@ -4910,7 +4910,7 @@
             </a:lvl1pPr>
           </a:lstStyle>
           <a:p>
-            <a:fld id="{1B04BB62-C2AB-41C2-872D-B54A11AB0DFD}" type="slidenum">
+            <a:fld id="{99B00457-9421-480B-984E-A4AE1866A6B8}" type="slidenum">
               <a:rPr lang="en-US"/>
               <a:t>‹#›</a:t>
             </a:fld>
@@ -5659,7 +5659,7 @@
             </a:lvl1pPr>
           </a:lstStyle>
           <a:p>
-            <a:fld id="{CF5DBBCA-BF76-4518-BE27-983E2439C515}" type="slidenum">
+            <a:fld id="{315DB2FB-35AF-4A70-91D3-DC5A8F70ABAA}" type="slidenum">
               <a:rPr lang="en-US"/>
               <a:t>‹#›</a:t>
             </a:fld>
@@ -6544,7 +6544,7 @@
           <a:p>
             <a:r>
               <a:rPr lang="ko-KR"/>
-              <a:t>나 혼자 · 1인 가구 · 0000. 00. 00</a:t>
+              <a:t>나 혼자 · 1인 가구 · 날짜 입력</a:t>
             </a:r>
           </a:p>
         </p:txBody>
@@ -6876,7 +6876,7 @@
           <a:bodyPr/>
           <a:lstStyle/>
           <a:p>
-            <a:fld id="{1AB5F805-8871-46AC-A14E-AB80CDF36F4D}" type="slidenum">
+            <a:fld id="{B9DE20D7-2BB7-4A89-A157-14978ABB4368}" type="slidenum">
               <a:rPr lang="en-US"/>
               <a:t>‹#›</a:t>
             </a:fld>
@@ -7520,7 +7520,7 @@
           <a:bodyPr/>
           <a:lstStyle/>
           <a:p>
-            <a:fld id="{EB4EE807-3902-493C-A01E-C5B68BAB7122}" type="slidenum">
+            <a:fld id="{6A02E7CC-FA18-4B81-9858-B7C4A34236A5}" type="slidenum">
               <a:rPr lang="en-US"/>
               <a:t>‹#›</a:t>
             </a:fld>
@@ -8384,7 +8384,7 @@
           <a:bodyPr/>
           <a:lstStyle/>
           <a:p>
-            <a:fld id="{7C6F3178-C112-4DA0-9EA5-A9A783CA03B7}" type="slidenum">
+            <a:fld id="{CC8B2F1F-62FC-4F4E-A689-8FD5BC35F158}" type="slidenum">
               <a:rPr lang="en-US"/>
               <a:t>‹#›</a:t>
             </a:fld>
@@ -9718,7 +9718,7 @@
           <a:bodyPr/>
           <a:lstStyle/>
           <a:p>
-            <a:fld id="{1E0D246E-957B-4F88-A5B9-F6BF7D4D5529}" type="slidenum">
+            <a:fld id="{D5CEA93B-DA0E-4E0B-9095-1A39C9DA713F}" type="slidenum">
               <a:rPr lang="en-US"/>
               <a:t>‹#›</a:t>
             </a:fld>
@@ -9828,7 +9828,7 @@
           <a:bodyPr/>
           <a:lstStyle/>
           <a:p>
-            <a:fld id="{0DAD98A4-E3CA-4ED5-BD10-A3E9B144D096}" type="slidenum">
+            <a:fld id="{A32B3A79-C47A-450C-803D-17EB6B0782F4}" type="slidenum">
               <a:rPr lang="en-US"/>
               <a:t>‹#›</a:t>
             </a:fld>
